--- a/assets/pptx/catalog-559.pptx
+++ b/assets/pptx/catalog-559.pptx
@@ -3255,7 +3255,7 @@
                 <a:ea typeface="Ebrima"/>
                 <a:cs typeface="Ebrima"/>
               </a:rPr>
-              <a:t>ሃሌሉያ ሃሌ ሃሌሉያ (4x)</a:t>
+              <a:t>ሃሌሉያ ሃሌ ሃሌሉያ 4x</a:t>
             </a:r>
           </a:p>
           <a:p>
@@ -3273,7 +3273,7 @@
                 <a:ea typeface="Ebrima"/>
                 <a:cs typeface="Ebrima"/>
               </a:rPr>
-              <a:t>ሃሌሉያ ሃሌ (4x)</a:t>
+              <a:t>ሃሌሉያ ሃሌ 4x</a:t>
             </a:r>
           </a:p>
         </p:txBody>
@@ -3340,7 +3340,7 @@
                 <a:ea typeface="Ebrima"/>
                 <a:cs typeface="Ebrima"/>
               </a:rPr>
-              <a:t>በፍቅርህ ዘይት ነፍሴን አረስርሰሃል (2x)</a:t>
+              <a:t>በፍቅርህ ዘይት ነፍሴን አረስርሰሃል 2x</a:t>
             </a:r>
           </a:p>
           <a:p>
@@ -3376,7 +3376,7 @@
                 <a:ea typeface="Ebrima"/>
                 <a:cs typeface="Ebrima"/>
               </a:rPr>
-              <a:t>በምህረትህ ዘይት ነፍሴን አረስርሰሃል (2x)</a:t>
+              <a:t>በምህረትህ ዘይት ነፍሴን አረስርሰሃል 2x</a:t>
             </a:r>
           </a:p>
           <a:p>
@@ -3479,7 +3479,7 @@
                 <a:ea typeface="Ebrima"/>
                 <a:cs typeface="Ebrima"/>
               </a:rPr>
-              <a:t>ደናግሎች አይተው ወደዱህ (5x)</a:t>
+              <a:t>ደናግሎች አይተው ወደዱህ 5x</a:t>
             </a:r>
           </a:p>
           <a:p>
@@ -3551,7 +3551,7 @@
                 <a:ea typeface="Ebrima"/>
                 <a:cs typeface="Ebrima"/>
               </a:rPr>
-              <a:t>መልካም የመዓዛ ሽታ አንተ አለህ (3x)</a:t>
+              <a:t>መልካም የመዓዛ ሽታ አንተ አለህ 3x</a:t>
             </a:r>
           </a:p>
         </p:txBody>
@@ -3618,7 +3618,7 @@
                 <a:ea typeface="Ebrima"/>
                 <a:cs typeface="Ebrima"/>
               </a:rPr>
-              <a:t>በፍቅርህ ዘይት ነፍሴን አረስርሰሃል (2x)</a:t>
+              <a:t>በፍቅርህ ዘይት ነፍሴን አረስርሰሃል 2x</a:t>
             </a:r>
           </a:p>
           <a:p>
@@ -3654,7 +3654,7 @@
                 <a:ea typeface="Ebrima"/>
                 <a:cs typeface="Ebrima"/>
               </a:rPr>
-              <a:t>በምህረትህ ዘይት ነፍሴን አረስርሰሃል (2x)</a:t>
+              <a:t>በምህረትህ ዘይት ነፍሴን አረስርሰሃል 2x</a:t>
             </a:r>
           </a:p>
           <a:p>
@@ -3860,7 +3860,7 @@
                 <a:ea typeface="Ebrima"/>
                 <a:cs typeface="Ebrima"/>
               </a:rPr>
-              <a:t>አንተ ብቻ ነህ (4x)</a:t>
+              <a:t>አንተ ብቻ ነህ 4x</a:t>
             </a:r>
           </a:p>
           <a:p>
@@ -3878,7 +3878,7 @@
                 <a:ea typeface="Ebrima"/>
                 <a:cs typeface="Ebrima"/>
               </a:rPr>
-              <a:t>አንተ ብቻ ነህ (4x)</a:t>
+              <a:t>አንተ ብቻ ነህ 4x</a:t>
             </a:r>
           </a:p>
           <a:p>
@@ -4089,7 +4089,7 @@
                 <a:ea typeface="Ebrima"/>
                 <a:cs typeface="Ebrima"/>
               </a:rPr>
-              <a:t>አንተ ነህ እስከዛሬ (2x)</a:t>
+              <a:t>አንተ ነህ እስከዛሬ 2x</a:t>
             </a:r>
           </a:p>
         </p:txBody>
@@ -4174,7 +4174,7 @@
                 <a:ea typeface="Ebrima"/>
                 <a:cs typeface="Ebrima"/>
               </a:rPr>
-              <a:t>ሁሉን የሚገዛ (2x)</a:t>
+              <a:t>ሁሉን የሚገዛ 2x</a:t>
             </a:r>
           </a:p>
           <a:p>
@@ -4192,7 +4192,7 @@
                 <a:ea typeface="Ebrima"/>
                 <a:cs typeface="Ebrima"/>
               </a:rPr>
-              <a:t>እያሉ ቀንና ሌሊት አይርፉም (4x)</a:t>
+              <a:t>እያሉ ቀንና ሌሊት አይርፉም 4x</a:t>
             </a:r>
           </a:p>
         </p:txBody>
@@ -4277,7 +4277,7 @@
                 <a:ea typeface="Ebrima"/>
                 <a:cs typeface="Ebrima"/>
               </a:rPr>
-              <a:t>በቀን በሌሊቱ ቅዱስ ነህ ይሉሃል (2x)</a:t>
+              <a:t>በቀን በሌሊቱ ቅዱስ ነህ ይሉሃል 2x</a:t>
             </a:r>
           </a:p>
           <a:p>
@@ -4313,7 +4313,7 @@
                 <a:ea typeface="Ebrima"/>
                 <a:cs typeface="Ebrima"/>
               </a:rPr>
-              <a:t>ሰው ላረከኝ ጌታ ምሥጋናን እሰዋለሁ (2x)</a:t>
+              <a:t>ሰው ላረከኝ ጌታ ምሥጋናን እሰዋለሁ 2x</a:t>
             </a:r>
           </a:p>
         </p:txBody>
@@ -4380,7 +4380,7 @@
                 <a:ea typeface="Ebrima"/>
                 <a:cs typeface="Ebrima"/>
               </a:rPr>
-              <a:t>እያሉ ቀንና ሌሊት አይርፉም (4x)</a:t>
+              <a:t>እያሉ ቀንና ሌሊት አይርፉም 4x</a:t>
             </a:r>
           </a:p>
         </p:txBody>
@@ -4465,7 +4465,7 @@
                 <a:ea typeface="Ebrima"/>
                 <a:cs typeface="Ebrima"/>
               </a:rPr>
-              <a:t>ተመስገን እንድልህ እንዳገለግልህ (2x)</a:t>
+              <a:t>ተመስገን እንድልህ እንዳገለግልህ 2x</a:t>
             </a:r>
           </a:p>
           <a:p>
@@ -4501,7 +4501,7 @@
                 <a:ea typeface="Ebrima"/>
                 <a:cs typeface="Ebrima"/>
               </a:rPr>
-              <a:t>ተባረክ እንድልህ እንዳገለግልህ (2x)</a:t>
+              <a:t>ተባረክ እንድልህ እንዳገለግልህ 2x</a:t>
             </a:r>
           </a:p>
           <a:p>
@@ -4537,7 +4537,7 @@
                 <a:ea typeface="Ebrima"/>
                 <a:cs typeface="Ebrima"/>
               </a:rPr>
-              <a:t>ከፍ በል እንድልህ እንዳገለግልህ (4x)</a:t>
+              <a:t>ከፍ በል እንድልህ እንዳገለግልህ 4x</a:t>
             </a:r>
           </a:p>
         </p:txBody>
@@ -4604,7 +4604,7 @@
                 <a:ea typeface="Ebrima"/>
                 <a:cs typeface="Ebrima"/>
               </a:rPr>
-              <a:t>ሃሌሉያ ሃሌ ሃሌሉያ (4x)</a:t>
+              <a:t>ሃሌሉያ ሃሌ ሃሌሉያ 4x</a:t>
             </a:r>
           </a:p>
           <a:p>
@@ -4622,7 +4622,7 @@
                 <a:ea typeface="Ebrima"/>
                 <a:cs typeface="Ebrima"/>
               </a:rPr>
-              <a:t>ሃሌሉያ ሃሌ (4x)</a:t>
+              <a:t>ሃሌሉያ ሃሌ 4x</a:t>
             </a:r>
           </a:p>
         </p:txBody>
@@ -4864,7 +4864,7 @@
                 <a:ea typeface="Ebrima"/>
                 <a:cs typeface="Ebrima"/>
               </a:rPr>
-              <a:t>የሌለህ እኩያ የሌለህ እኩያ (2x)</a:t>
+              <a:t>የሌለህ እኩያ የሌለህ እኩያ 2x</a:t>
             </a:r>
           </a:p>
         </p:txBody>
@@ -4931,7 +4931,7 @@
                 <a:ea typeface="Ebrima"/>
                 <a:cs typeface="Ebrima"/>
               </a:rPr>
-              <a:t>ሃሌሉያ (3x) (ሃሌሉያ)</a:t>
+              <a:t>ሃሌሉያ 3x ሃሌሉያ</a:t>
             </a:r>
           </a:p>
           <a:p>
@@ -4949,7 +4949,7 @@
                 <a:ea typeface="Ebrima"/>
                 <a:cs typeface="Ebrima"/>
               </a:rPr>
-              <a:t>ሃሌሉያ (2x) ሃሌሉያ</a:t>
+              <a:t>ሃሌሉያ 2x ሃሌሉያ</a:t>
             </a:r>
           </a:p>
           <a:p>
@@ -4967,7 +4967,7 @@
                 <a:ea typeface="Ebrima"/>
                 <a:cs typeface="Ebrima"/>
               </a:rPr>
-              <a:t>ሃሌሉያ (3x) ሃሌሉያ</a:t>
+              <a:t>ሃሌሉያ 3x ሃሌሉያ</a:t>
             </a:r>
           </a:p>
         </p:txBody>
